--- a/1С_Предприятие/практика 6.pptx
+++ b/1С_Предприятие/практика 6.pptx
@@ -10,8 +10,9 @@
     <p:sldId id="257" r:id="rId4"/>
     <p:sldId id="259" r:id="rId5"/>
     <p:sldId id="260" r:id="rId6"/>
-    <p:sldId id="258" r:id="rId7"/>
-    <p:sldId id="261" r:id="rId8"/>
+    <p:sldId id="263" r:id="rId7"/>
+    <p:sldId id="258" r:id="rId8"/>
+    <p:sldId id="261" r:id="rId9"/>
   </p:sldIdLst>
   <p:sldSz cx="9144000" cy="6858000" type="screen4x3"/>
   <p:notesSz cx="6858000" cy="9144000"/>
@@ -295,7 +296,7 @@
             <a:fld id="{E1AAB751-8214-4DCA-A67E-1243E59E7911}" type="datetimeFigureOut">
               <a:rPr lang="ru-RU" smtClean="0"/>
               <a:pPr/>
-              <a:t>07.04.2026</a:t>
+              <a:t>12.04.2026</a:t>
             </a:fld>
             <a:endParaRPr lang="ru-RU"/>
           </a:p>
@@ -462,7 +463,7 @@
             <a:fld id="{E1AAB751-8214-4DCA-A67E-1243E59E7911}" type="datetimeFigureOut">
               <a:rPr lang="ru-RU" smtClean="0"/>
               <a:pPr/>
-              <a:t>07.04.2026</a:t>
+              <a:t>12.04.2026</a:t>
             </a:fld>
             <a:endParaRPr lang="ru-RU"/>
           </a:p>
@@ -639,7 +640,7 @@
             <a:fld id="{E1AAB751-8214-4DCA-A67E-1243E59E7911}" type="datetimeFigureOut">
               <a:rPr lang="ru-RU" smtClean="0"/>
               <a:pPr/>
-              <a:t>07.04.2026</a:t>
+              <a:t>12.04.2026</a:t>
             </a:fld>
             <a:endParaRPr lang="ru-RU"/>
           </a:p>
@@ -806,7 +807,7 @@
             <a:fld id="{E1AAB751-8214-4DCA-A67E-1243E59E7911}" type="datetimeFigureOut">
               <a:rPr lang="ru-RU" smtClean="0"/>
               <a:pPr/>
-              <a:t>07.04.2026</a:t>
+              <a:t>12.04.2026</a:t>
             </a:fld>
             <a:endParaRPr lang="ru-RU"/>
           </a:p>
@@ -1049,7 +1050,7 @@
             <a:fld id="{E1AAB751-8214-4DCA-A67E-1243E59E7911}" type="datetimeFigureOut">
               <a:rPr lang="ru-RU" smtClean="0"/>
               <a:pPr/>
-              <a:t>07.04.2026</a:t>
+              <a:t>12.04.2026</a:t>
             </a:fld>
             <a:endParaRPr lang="ru-RU"/>
           </a:p>
@@ -1334,7 +1335,7 @@
             <a:fld id="{E1AAB751-8214-4DCA-A67E-1243E59E7911}" type="datetimeFigureOut">
               <a:rPr lang="ru-RU" smtClean="0"/>
               <a:pPr/>
-              <a:t>07.04.2026</a:t>
+              <a:t>12.04.2026</a:t>
             </a:fld>
             <a:endParaRPr lang="ru-RU"/>
           </a:p>
@@ -1753,7 +1754,7 @@
             <a:fld id="{E1AAB751-8214-4DCA-A67E-1243E59E7911}" type="datetimeFigureOut">
               <a:rPr lang="ru-RU" smtClean="0"/>
               <a:pPr/>
-              <a:t>07.04.2026</a:t>
+              <a:t>12.04.2026</a:t>
             </a:fld>
             <a:endParaRPr lang="ru-RU"/>
           </a:p>
@@ -1868,7 +1869,7 @@
             <a:fld id="{E1AAB751-8214-4DCA-A67E-1243E59E7911}" type="datetimeFigureOut">
               <a:rPr lang="ru-RU" smtClean="0"/>
               <a:pPr/>
-              <a:t>07.04.2026</a:t>
+              <a:t>12.04.2026</a:t>
             </a:fld>
             <a:endParaRPr lang="ru-RU"/>
           </a:p>
@@ -1960,7 +1961,7 @@
             <a:fld id="{E1AAB751-8214-4DCA-A67E-1243E59E7911}" type="datetimeFigureOut">
               <a:rPr lang="ru-RU" smtClean="0"/>
               <a:pPr/>
-              <a:t>07.04.2026</a:t>
+              <a:t>12.04.2026</a:t>
             </a:fld>
             <a:endParaRPr lang="ru-RU"/>
           </a:p>
@@ -2234,7 +2235,7 @@
             <a:fld id="{E1AAB751-8214-4DCA-A67E-1243E59E7911}" type="datetimeFigureOut">
               <a:rPr lang="ru-RU" smtClean="0"/>
               <a:pPr/>
-              <a:t>07.04.2026</a:t>
+              <a:t>12.04.2026</a:t>
             </a:fld>
             <a:endParaRPr lang="ru-RU"/>
           </a:p>
@@ -2484,7 +2485,7 @@
             <a:fld id="{E1AAB751-8214-4DCA-A67E-1243E59E7911}" type="datetimeFigureOut">
               <a:rPr lang="ru-RU" smtClean="0"/>
               <a:pPr/>
-              <a:t>07.04.2026</a:t>
+              <a:t>12.04.2026</a:t>
             </a:fld>
             <a:endParaRPr lang="ru-RU"/>
           </a:p>
@@ -2694,7 +2695,7 @@
             <a:fld id="{E1AAB751-8214-4DCA-A67E-1243E59E7911}" type="datetimeFigureOut">
               <a:rPr lang="ru-RU" smtClean="0"/>
               <a:pPr/>
-              <a:t>07.04.2026</a:t>
+              <a:t>12.04.2026</a:t>
             </a:fld>
             <a:endParaRPr lang="ru-RU"/>
           </a:p>
@@ -3158,7 +3159,7 @@
         <p:spPr>
           <a:xfrm>
             <a:off x="0" y="1500174"/>
-            <a:ext cx="9144000" cy="2677656"/>
+            <a:ext cx="9144000" cy="1938992"/>
           </a:xfrm>
           <a:prstGeom prst="rect">
             <a:avLst/>
@@ -3214,35 +3215,6 @@
           </a:p>
           <a:p>
             <a:pPr algn="just"/>
-            <a:endParaRPr lang="en-US" sz="2400" dirty="0" smtClean="0">
-              <a:latin typeface="Times New Roman" pitchFamily="18" charset="0"/>
-              <a:cs typeface="Times New Roman" pitchFamily="18" charset="0"/>
-            </a:endParaRPr>
-          </a:p>
-          <a:p>
-            <a:pPr algn="just"/>
-            <a:r>
-              <a:rPr lang="ru-RU" sz="2400" dirty="0" smtClean="0">
-                <a:latin typeface="Times New Roman" pitchFamily="18" charset="0"/>
-                <a:cs typeface="Times New Roman" pitchFamily="18" charset="0"/>
-              </a:rPr>
-              <a:t>Как отобразить регистр накопления в Интерфейсе и в подсистеме</a:t>
-            </a:r>
-            <a:endParaRPr lang="en-US" sz="2400" dirty="0" smtClean="0">
-              <a:latin typeface="Times New Roman" pitchFamily="18" charset="0"/>
-              <a:cs typeface="Times New Roman" pitchFamily="18" charset="0"/>
-            </a:endParaRPr>
-          </a:p>
-          <a:p>
-            <a:pPr algn="just"/>
-            <a:r>
-              <a:rPr lang="en-US" sz="2400" dirty="0" smtClean="0">
-                <a:latin typeface="Times New Roman" pitchFamily="18" charset="0"/>
-                <a:cs typeface="Times New Roman" pitchFamily="18" charset="0"/>
-                <a:hlinkClick r:id="rId4"/>
-              </a:rPr>
-              <a:t>https://rutube.ru/video/ad659dec500903b8139ea8a79e580879/</a:t>
-            </a:r>
             <a:endParaRPr lang="en-US" sz="2400" dirty="0" smtClean="0">
               <a:latin typeface="Times New Roman" pitchFamily="18" charset="0"/>
               <a:cs typeface="Times New Roman" pitchFamily="18" charset="0"/>
@@ -3648,7 +3620,7 @@
         <p:spPr>
           <a:xfrm>
             <a:off x="0" y="2214554"/>
-            <a:ext cx="5261056" cy="369332"/>
+            <a:ext cx="5433923" cy="646331"/>
           </a:xfrm>
           <a:prstGeom prst="rect">
             <a:avLst/>
@@ -3666,6 +3638,19 @@
                 <a:cs typeface="Times New Roman" pitchFamily="18" charset="0"/>
               </a:rPr>
               <a:t>Обработка проведения для документа Поступление</a:t>
+            </a:r>
+            <a:endParaRPr lang="en-US" dirty="0" smtClean="0">
+              <a:latin typeface="Times New Roman" pitchFamily="18" charset="0"/>
+              <a:cs typeface="Times New Roman" pitchFamily="18" charset="0"/>
+            </a:endParaRPr>
+          </a:p>
+          <a:p>
+            <a:r>
+              <a:rPr lang="ru-RU" dirty="0" smtClean="0">
+                <a:latin typeface="Times New Roman" pitchFamily="18" charset="0"/>
+                <a:cs typeface="Times New Roman" pitchFamily="18" charset="0"/>
+              </a:rPr>
+              <a:t>Можно использовать вкладку Движение в Документе</a:t>
             </a:r>
             <a:endParaRPr lang="ru-RU" dirty="0"/>
           </a:p>
@@ -3685,6 +3670,9 @@
           <a:prstGeom prst="rect">
             <a:avLst/>
           </a:prstGeom>
+          <a:solidFill>
+            <a:schemeClr val="bg2"/>
+          </a:solidFill>
         </p:spPr>
         <p:txBody>
           <a:bodyPr wrap="square">
@@ -3712,7 +3700,7 @@
       </p:sp>
       <p:pic>
         <p:nvPicPr>
-          <p:cNvPr id="2052" name="Picture 4"/>
+          <p:cNvPr id="1026" name="Picture 2"/>
           <p:cNvPicPr>
             <a:picLocks noChangeAspect="1" noChangeArrowheads="1"/>
           </p:cNvPicPr>
@@ -3727,7 +3715,65 @@
         </p:blipFill>
         <p:spPr bwMode="auto">
           <a:xfrm>
-            <a:off x="0" y="4318712"/>
+            <a:off x="0" y="2800350"/>
+            <a:ext cx="5791200" cy="4057650"/>
+          </a:xfrm>
+          <a:prstGeom prst="rect">
+            <a:avLst/>
+          </a:prstGeom>
+          <a:noFill/>
+          <a:ln w="9525">
+            <a:noFill/>
+            <a:miter lim="800000"/>
+            <a:headEnd/>
+            <a:tailEnd/>
+          </a:ln>
+          <a:effectLst/>
+        </p:spPr>
+      </p:pic>
+    </p:spTree>
+  </p:cSld>
+  <p:clrMapOvr>
+    <a:masterClrMapping/>
+  </p:clrMapOvr>
+</p:sld>
+</file>
+
+<file path=ppt/slides/slide6.xml><?xml version="1.0" encoding="utf-8"?>
+<p:sld xmlns:a="http://schemas.openxmlformats.org/drawingml/2006/main" xmlns:r="http://schemas.openxmlformats.org/officeDocument/2006/relationships" xmlns:p="http://schemas.openxmlformats.org/presentationml/2006/main">
+  <p:cSld>
+    <p:spTree>
+      <p:nvGrpSpPr>
+        <p:cNvPr id="1" name=""/>
+        <p:cNvGrpSpPr/>
+        <p:nvPr/>
+      </p:nvGrpSpPr>
+      <p:grpSpPr>
+        <a:xfrm>
+          <a:off x="0" y="0"/>
+          <a:ext cx="0" cy="0"/>
+          <a:chOff x="0" y="0"/>
+          <a:chExt cx="0" cy="0"/>
+        </a:xfrm>
+      </p:grpSpPr>
+      <p:pic>
+        <p:nvPicPr>
+          <p:cNvPr id="2052" name="Picture 4"/>
+          <p:cNvPicPr>
+            <a:picLocks noChangeAspect="1" noChangeArrowheads="1"/>
+          </p:cNvPicPr>
+          <p:nvPr/>
+        </p:nvPicPr>
+        <p:blipFill>
+          <a:blip r:embed="rId2"/>
+          <a:srcRect/>
+          <a:stretch>
+            <a:fillRect/>
+          </a:stretch>
+        </p:blipFill>
+        <p:spPr bwMode="auto">
+          <a:xfrm>
+            <a:off x="0" y="2928934"/>
             <a:ext cx="9144000" cy="2539288"/>
           </a:xfrm>
           <a:prstGeom prst="rect">
@@ -3751,8 +3797,8 @@
         </p:nvSpPr>
         <p:spPr>
           <a:xfrm>
-            <a:off x="0" y="2716596"/>
-            <a:ext cx="9144000" cy="1569660"/>
+            <a:off x="0" y="285728"/>
+            <a:ext cx="9144000" cy="2246769"/>
           </a:xfrm>
           <a:prstGeom prst="rect">
             <a:avLst/>
@@ -3766,21 +3812,21 @@
           <a:p>
             <a:pPr algn="just"/>
             <a:r>
-              <a:rPr lang="ru-RU" sz="1600" dirty="0" smtClean="0">
+              <a:rPr lang="ru-RU" sz="2000" dirty="0" smtClean="0">
                 <a:latin typeface="Times New Roman" pitchFamily="18" charset="0"/>
                 <a:cs typeface="Times New Roman" pitchFamily="18" charset="0"/>
               </a:rPr>
               <a:t>В запросе указывается: взять из регистра накопления </a:t>
             </a:r>
             <a:r>
-              <a:rPr lang="ru-RU" sz="1600" dirty="0" err="1" smtClean="0">
+              <a:rPr lang="ru-RU" sz="2000" dirty="0" err="1" smtClean="0">
                 <a:latin typeface="Times New Roman" pitchFamily="18" charset="0"/>
                 <a:cs typeface="Times New Roman" pitchFamily="18" charset="0"/>
               </a:rPr>
               <a:t>УчётКанцтоваров</a:t>
             </a:r>
             <a:r>
-              <a:rPr lang="ru-RU" sz="1600" dirty="0" smtClean="0">
+              <a:rPr lang="ru-RU" sz="2000" dirty="0" smtClean="0">
                 <a:latin typeface="Times New Roman" pitchFamily="18" charset="0"/>
                 <a:cs typeface="Times New Roman" pitchFamily="18" charset="0"/>
               </a:rPr>
@@ -3790,21 +3836,21 @@
           <a:p>
             <a:pPr algn="just"/>
             <a:r>
-              <a:rPr lang="ru-RU" sz="1600" dirty="0" smtClean="0">
+              <a:rPr lang="ru-RU" sz="2000" dirty="0" smtClean="0">
                 <a:latin typeface="Times New Roman" pitchFamily="18" charset="0"/>
                 <a:cs typeface="Times New Roman" pitchFamily="18" charset="0"/>
               </a:rPr>
               <a:t>В результате запроса нужны два поля: наименование товара (Товар) и количество этого товара на остатке (</a:t>
             </a:r>
             <a:r>
-              <a:rPr lang="ru-RU" sz="1600" dirty="0" err="1" smtClean="0">
+              <a:rPr lang="ru-RU" sz="2000" dirty="0" err="1" smtClean="0">
                 <a:latin typeface="Times New Roman" pitchFamily="18" charset="0"/>
                 <a:cs typeface="Times New Roman" pitchFamily="18" charset="0"/>
               </a:rPr>
               <a:t>КоличествоОстаток</a:t>
             </a:r>
             <a:r>
-              <a:rPr lang="ru-RU" sz="1600" dirty="0" smtClean="0">
+              <a:rPr lang="ru-RU" sz="2000" dirty="0" smtClean="0">
                 <a:latin typeface="Times New Roman" pitchFamily="18" charset="0"/>
                 <a:cs typeface="Times New Roman" pitchFamily="18" charset="0"/>
               </a:rPr>
@@ -3814,27 +3860,27 @@
           <a:p>
             <a:pPr algn="just"/>
             <a:r>
-              <a:rPr lang="ru-RU" sz="1600" dirty="0" smtClean="0">
+              <a:rPr lang="ru-RU" sz="2000" dirty="0" smtClean="0">
                 <a:latin typeface="Times New Roman" pitchFamily="18" charset="0"/>
                 <a:cs typeface="Times New Roman" pitchFamily="18" charset="0"/>
               </a:rPr>
               <a:t>Для таблицы в запросе задаётся временное имя (псевдоним) </a:t>
             </a:r>
             <a:r>
-              <a:rPr lang="ru-RU" sz="1600" dirty="0" err="1" smtClean="0">
+              <a:rPr lang="ru-RU" sz="2000" dirty="0" err="1" smtClean="0">
                 <a:latin typeface="Times New Roman" pitchFamily="18" charset="0"/>
                 <a:cs typeface="Times New Roman" pitchFamily="18" charset="0"/>
               </a:rPr>
               <a:t>УчётКанцтоваровОстатки</a:t>
             </a:r>
             <a:r>
-              <a:rPr lang="ru-RU" sz="1600" dirty="0" smtClean="0">
+              <a:rPr lang="ru-RU" sz="2000" dirty="0" smtClean="0">
                 <a:latin typeface="Times New Roman" pitchFamily="18" charset="0"/>
                 <a:cs typeface="Times New Roman" pitchFamily="18" charset="0"/>
               </a:rPr>
               <a:t> — чтобы удобно ссылаться на неё в других частях запроса.</a:t>
             </a:r>
-            <a:endParaRPr lang="ru-RU" sz="1600" dirty="0">
+            <a:endParaRPr lang="ru-RU" sz="2000" dirty="0">
               <a:latin typeface="Times New Roman" pitchFamily="18" charset="0"/>
               <a:cs typeface="Times New Roman" pitchFamily="18" charset="0"/>
             </a:endParaRPr>
@@ -3849,7 +3895,7 @@
 </p:sld>
 </file>
 
-<file path=ppt/slides/slide6.xml><?xml version="1.0" encoding="utf-8"?>
+<file path=ppt/slides/slide7.xml><?xml version="1.0" encoding="utf-8"?>
 <p:sld xmlns:a="http://schemas.openxmlformats.org/drawingml/2006/main" xmlns:r="http://schemas.openxmlformats.org/officeDocument/2006/relationships" xmlns:p="http://schemas.openxmlformats.org/presentationml/2006/main">
   <p:cSld>
     <p:spTree>
@@ -4137,7 +4183,7 @@
 </p:sld>
 </file>
 
-<file path=ppt/slides/slide7.xml><?xml version="1.0" encoding="utf-8"?>
+<file path=ppt/slides/slide8.xml><?xml version="1.0" encoding="utf-8"?>
 <p:sld xmlns:a="http://schemas.openxmlformats.org/drawingml/2006/main" xmlns:r="http://schemas.openxmlformats.org/officeDocument/2006/relationships" xmlns:p="http://schemas.openxmlformats.org/presentationml/2006/main">
   <p:cSld>
     <p:spTree>
